--- a/LevelUp_SD_Presentation.pptx
+++ b/LevelUp_SD_Presentation.pptx
@@ -1855,7 +1855,7 @@
                 <a:ea typeface="Calibri" pitchFamily="34" charset="-122"/>
                 <a:cs typeface="Calibri" pitchFamily="34" charset="-120"/>
               </a:rPr>
-              <a:t>Università degli Studi di Salerno — Dipartimento di Informatica</a:t>
+              <a:t>Università degli Studi di Salerno - Dipartimento di Informatica</a:t>
             </a:r>
             <a:endParaRPr lang="en-US" sz="1300" dirty="0"/>
           </a:p>
@@ -2117,7 +2117,7 @@
         </p:nvSpPr>
         <p:spPr>
           <a:xfrm>
-            <a:off x="822960" y="3465231"/>
+            <a:off x="822960" y="3273724"/>
             <a:ext cx="2593100" cy="731520"/>
           </a:xfrm>
           <a:prstGeom prst="rect">
@@ -2133,7 +2133,7 @@
             <a:pPr marL="0" indent="0">
               <a:buNone/>
             </a:pPr>
-            <a:r>
+            <a:br>
               <a:rPr lang="en-US" sz="1200" dirty="0">
                 <a:solidFill>
                   <a:srgbClr val="CADCFC"/>
@@ -2142,7 +2142,17 @@
                 <a:ea typeface="Calibri" pitchFamily="34" charset="-122"/>
                 <a:cs typeface="Calibri" pitchFamily="34" charset="-120"/>
               </a:rPr>
-              <a:t>Effectively free computationally which confirms latency in this application comes from the database round-trip, not from in-application logic.</a:t>
+            </a:br>
+            <a:r>
+              <a:rPr lang="en-US" sz="1200" dirty="0">
+                <a:solidFill>
+                  <a:srgbClr val="CADCFC"/>
+                </a:solidFill>
+                <a:latin typeface="Calibri" pitchFamily="34" charset="0"/>
+                <a:ea typeface="Calibri" pitchFamily="34" charset="-122"/>
+                <a:cs typeface="Calibri" pitchFamily="34" charset="-120"/>
+              </a:rPr>
+              <a:t>Confirms computation for this method is effectively free and latency in this application comes mostly from database interactions rather than application logic</a:t>
             </a:r>
             <a:endParaRPr lang="en-US" sz="1200" dirty="0"/>
           </a:p>
@@ -2156,7 +2166,7 @@
         </p:nvSpPr>
         <p:spPr>
           <a:xfrm>
-            <a:off x="5947913" y="5339937"/>
+            <a:off x="5752956" y="6223097"/>
             <a:ext cx="4114800" cy="365760"/>
           </a:xfrm>
           <a:prstGeom prst="rect">
@@ -2173,6 +2183,17 @@
               <a:buNone/>
             </a:pPr>
             <a:r>
+              <a:rPr lang="en-US" sz="1200" i="1" dirty="0" err="1">
+                <a:solidFill>
+                  <a:srgbClr val="5B6B8C"/>
+                </a:solidFill>
+                <a:latin typeface="Calibri" pitchFamily="34" charset="0"/>
+                <a:ea typeface="Calibri" pitchFamily="34" charset="-122"/>
+                <a:cs typeface="Calibri" pitchFamily="34" charset="-120"/>
+              </a:rPr>
+              <a:t>CorsoSearchBenchmark</a:t>
+            </a:r>
+            <a:r>
               <a:rPr lang="en-US" sz="1200" i="1" dirty="0">
                 <a:solidFill>
                   <a:srgbClr val="5B6B8C"/>
@@ -2181,7 +2202,7 @@
                 <a:ea typeface="Calibri" pitchFamily="34" charset="-122"/>
                 <a:cs typeface="Calibri" pitchFamily="34" charset="-120"/>
               </a:rPr>
-              <a:t>JMH benchmark console output</a:t>
+              <a:t> Class</a:t>
             </a:r>
             <a:endParaRPr lang="en-US" sz="1200" dirty="0"/>
           </a:p>
@@ -2212,6 +2233,17 @@
               <a:buNone/>
             </a:pPr>
             <a:r>
+              <a:rPr lang="en-US" sz="1000" dirty="0" err="1">
+                <a:solidFill>
+                  <a:srgbClr val="5B6B8C"/>
+                </a:solidFill>
+                <a:latin typeface="Calibri" pitchFamily="34" charset="0"/>
+                <a:ea typeface="Calibri" pitchFamily="34" charset="-122"/>
+                <a:cs typeface="Calibri" pitchFamily="34" charset="-120"/>
+              </a:rPr>
+              <a:t>LevelUp</a:t>
+            </a:r>
+            <a:r>
               <a:rPr lang="en-US" sz="1000" dirty="0">
                 <a:solidFill>
                   <a:srgbClr val="5B6B8C"/>
@@ -2220,7 +2252,7 @@
                 <a:ea typeface="Calibri" pitchFamily="34" charset="-122"/>
                 <a:cs typeface="Calibri" pitchFamily="34" charset="-120"/>
               </a:rPr>
-              <a:t>LevelUp — Software Dependability</a:t>
+              <a:t> - Software Dependability</a:t>
             </a:r>
             <a:endParaRPr lang="en-US" sz="1000" dirty="0"/>
           </a:p>
@@ -2267,10 +2299,10 @@
       </p:sp>
       <p:pic>
         <p:nvPicPr>
-          <p:cNvPr id="20" name="Immagine 19">
+          <p:cNvPr id="9" name="Immagine 8">
             <a:extLst>
               <a:ext uri="{FF2B5EF4-FFF2-40B4-BE49-F238E27FC236}">
-                <a16:creationId xmlns:a16="http://schemas.microsoft.com/office/drawing/2014/main" id="{51B4CED5-4E35-B919-E9FC-47F2EB675053}"/>
+                <a16:creationId xmlns:a16="http://schemas.microsoft.com/office/drawing/2014/main" id="{995BF51D-8C32-50D4-354F-1181BC0B8079}"/>
               </a:ext>
             </a:extLst>
           </p:cNvPr>
@@ -2287,8 +2319,8 @@
         </p:blipFill>
         <p:spPr>
           <a:xfrm>
-            <a:off x="3953618" y="2103120"/>
-            <a:ext cx="8103390" cy="3181794"/>
+            <a:off x="4028970" y="1888709"/>
+            <a:ext cx="7562772" cy="4217068"/>
           </a:xfrm>
           <a:prstGeom prst="rect">
             <a:avLst/>
@@ -2713,6 +2745,17 @@
               <a:buNone/>
             </a:pPr>
             <a:r>
+              <a:rPr lang="en-US" sz="1000" dirty="0" err="1">
+                <a:solidFill>
+                  <a:srgbClr val="5B6B8C"/>
+                </a:solidFill>
+                <a:latin typeface="Calibri" pitchFamily="34" charset="0"/>
+                <a:ea typeface="Calibri" pitchFamily="34" charset="-122"/>
+                <a:cs typeface="Calibri" pitchFamily="34" charset="-120"/>
+              </a:rPr>
+              <a:t>LevelUp</a:t>
+            </a:r>
+            <a:r>
               <a:rPr lang="en-US" sz="1000" dirty="0">
                 <a:solidFill>
                   <a:srgbClr val="5B6B8C"/>
@@ -2721,7 +2764,7 @@
                 <a:ea typeface="Calibri" pitchFamily="34" charset="-122"/>
                 <a:cs typeface="Calibri" pitchFamily="34" charset="-120"/>
               </a:rPr>
-              <a:t>LevelUp — Software Dependability</a:t>
+              <a:t> - Software Dependability</a:t>
             </a:r>
             <a:endParaRPr lang="en-US" sz="1000" dirty="0"/>
           </a:p>
@@ -2937,7 +2980,7 @@
                 <a:ea typeface="Calibri" pitchFamily="34" charset="-122"/>
                 <a:cs typeface="Calibri" pitchFamily="34" charset="-120"/>
               </a:rPr>
-              <a:t>Search silently excludes courses missing a category/tag/creator association</a:t>
+              <a:t>Search silently excluded courses missing a category/tag/creator association</a:t>
             </a:r>
             <a:endParaRPr lang="en-US" sz="1500" dirty="0"/>
           </a:p>
@@ -3478,7 +3521,7 @@
                 <a:ea typeface="Calibri" pitchFamily="34" charset="-122"/>
                 <a:cs typeface="Calibri" pitchFamily="34" charset="-120"/>
               </a:rPr>
-              <a:t>Latent bug which surfaced only by containerization on Linux</a:t>
+              <a:t>Database password was hardcoded across 3 files</a:t>
             </a:r>
             <a:endParaRPr lang="en-US" sz="1500" dirty="0"/>
           </a:p>
@@ -3509,6 +3552,17 @@
               <a:buNone/>
             </a:pPr>
             <a:r>
+              <a:rPr lang="en-US" sz="1000" dirty="0" err="1">
+                <a:solidFill>
+                  <a:srgbClr val="5B6B8C"/>
+                </a:solidFill>
+                <a:latin typeface="Calibri" pitchFamily="34" charset="0"/>
+                <a:ea typeface="Calibri" pitchFamily="34" charset="-122"/>
+                <a:cs typeface="Calibri" pitchFamily="34" charset="-120"/>
+              </a:rPr>
+              <a:t>LevelUp</a:t>
+            </a:r>
+            <a:r>
               <a:rPr lang="en-US" sz="1000" dirty="0">
                 <a:solidFill>
                   <a:srgbClr val="5B6B8C"/>
@@ -3517,7 +3571,7 @@
                 <a:ea typeface="Calibri" pitchFamily="34" charset="-122"/>
                 <a:cs typeface="Calibri" pitchFamily="34" charset="-120"/>
               </a:rPr>
-              <a:t>LevelUp — Software Dependability</a:t>
+              <a:t> - Software Dependability</a:t>
             </a:r>
             <a:endParaRPr lang="en-US" sz="1000" dirty="0"/>
           </a:p>
@@ -3765,6 +3819,17 @@
               <a:buNone/>
             </a:pPr>
             <a:r>
+              <a:rPr lang="en-US" sz="1000" dirty="0" err="1">
+                <a:solidFill>
+                  <a:srgbClr val="5B6B8C"/>
+                </a:solidFill>
+                <a:latin typeface="Calibri" pitchFamily="34" charset="0"/>
+                <a:ea typeface="Calibri" pitchFamily="34" charset="-122"/>
+                <a:cs typeface="Calibri" pitchFamily="34" charset="-120"/>
+              </a:rPr>
+              <a:t>LevelUp</a:t>
+            </a:r>
+            <a:r>
               <a:rPr lang="en-US" sz="1000" dirty="0">
                 <a:solidFill>
                   <a:srgbClr val="5B6B8C"/>
@@ -3773,7 +3838,7 @@
                 <a:ea typeface="Calibri" pitchFamily="34" charset="-122"/>
                 <a:cs typeface="Calibri" pitchFamily="34" charset="-120"/>
               </a:rPr>
-              <a:t>LevelUp — Software Dependability</a:t>
+              <a:t> - Software Dependability</a:t>
             </a:r>
             <a:endParaRPr lang="en-US" sz="1000" dirty="0"/>
           </a:p>
@@ -4492,6 +4557,17 @@
               <a:buNone/>
             </a:pPr>
             <a:r>
+              <a:rPr lang="en-US" sz="1000" dirty="0" err="1">
+                <a:solidFill>
+                  <a:srgbClr val="5B6B8C"/>
+                </a:solidFill>
+                <a:latin typeface="Calibri" pitchFamily="34" charset="0"/>
+                <a:ea typeface="Calibri" pitchFamily="34" charset="-122"/>
+                <a:cs typeface="Calibri" pitchFamily="34" charset="-120"/>
+              </a:rPr>
+              <a:t>LevelUp</a:t>
+            </a:r>
+            <a:r>
               <a:rPr lang="en-US" sz="1000" dirty="0">
                 <a:solidFill>
                   <a:srgbClr val="5B6B8C"/>
@@ -4500,7 +4576,7 @@
                 <a:ea typeface="Calibri" pitchFamily="34" charset="-122"/>
                 <a:cs typeface="Calibri" pitchFamily="34" charset="-120"/>
               </a:rPr>
-              <a:t>LevelUp — Software Dependability</a:t>
+              <a:t> - Software Dependability</a:t>
             </a:r>
             <a:endParaRPr lang="en-US" sz="1000" dirty="0"/>
           </a:p>
@@ -5731,6 +5807,17 @@
               <a:buNone/>
             </a:pPr>
             <a:r>
+              <a:rPr lang="en-US" sz="1000" dirty="0" err="1">
+                <a:solidFill>
+                  <a:srgbClr val="5B6B8C"/>
+                </a:solidFill>
+                <a:latin typeface="Calibri" pitchFamily="34" charset="0"/>
+                <a:ea typeface="Calibri" pitchFamily="34" charset="-122"/>
+                <a:cs typeface="Calibri" pitchFamily="34" charset="-120"/>
+              </a:rPr>
+              <a:t>LevelUp</a:t>
+            </a:r>
+            <a:r>
               <a:rPr lang="en-US" sz="1000" dirty="0">
                 <a:solidFill>
                   <a:srgbClr val="5B6B8C"/>
@@ -5739,7 +5826,7 @@
                 <a:ea typeface="Calibri" pitchFamily="34" charset="-122"/>
                 <a:cs typeface="Calibri" pitchFamily="34" charset="-120"/>
               </a:rPr>
-              <a:t>LevelUp — Software Dependability</a:t>
+              <a:t> - Software Dependability</a:t>
             </a:r>
             <a:endParaRPr lang="en-US" sz="1000" dirty="0"/>
           </a:p>
@@ -6873,6 +6960,17 @@
               <a:buNone/>
             </a:pPr>
             <a:r>
+              <a:rPr lang="en-US" sz="1000" dirty="0" err="1">
+                <a:solidFill>
+                  <a:srgbClr val="5B6B8C"/>
+                </a:solidFill>
+                <a:latin typeface="Calibri" pitchFamily="34" charset="0"/>
+                <a:ea typeface="Calibri" pitchFamily="34" charset="-122"/>
+                <a:cs typeface="Calibri" pitchFamily="34" charset="-120"/>
+              </a:rPr>
+              <a:t>LevelUp</a:t>
+            </a:r>
+            <a:r>
               <a:rPr lang="en-US" sz="1000" dirty="0">
                 <a:solidFill>
                   <a:srgbClr val="5B6B8C"/>
@@ -6881,7 +6979,7 @@
                 <a:ea typeface="Calibri" pitchFamily="34" charset="-122"/>
                 <a:cs typeface="Calibri" pitchFamily="34" charset="-120"/>
               </a:rPr>
-              <a:t>LevelUp — Software Dependability</a:t>
+              <a:t> - Software Dependability</a:t>
             </a:r>
             <a:endParaRPr lang="en-US" sz="1000" dirty="0"/>
           </a:p>
@@ -7137,7 +7235,7 @@
                 <a:ea typeface="Calibri" pitchFamily="34" charset="-122"/>
                 <a:cs typeface="Calibri" pitchFamily="34" charset="-120"/>
               </a:rPr>
-              <a:t>GitHub Actions run — build job passing, MySQL service included</a:t>
+              <a:t>GitHub Actions run with build job passing, MySQL service included</a:t>
             </a:r>
             <a:endParaRPr lang="en-US" sz="1200" dirty="0"/>
           </a:p>
@@ -7168,6 +7266,17 @@
               <a:buNone/>
             </a:pPr>
             <a:r>
+              <a:rPr lang="en-US" sz="1000" dirty="0" err="1">
+                <a:solidFill>
+                  <a:srgbClr val="5B6B8C"/>
+                </a:solidFill>
+                <a:latin typeface="Calibri" pitchFamily="34" charset="0"/>
+                <a:ea typeface="Calibri" pitchFamily="34" charset="-122"/>
+                <a:cs typeface="Calibri" pitchFamily="34" charset="-120"/>
+              </a:rPr>
+              <a:t>LevelUp</a:t>
+            </a:r>
+            <a:r>
               <a:rPr lang="en-US" sz="1000" dirty="0">
                 <a:solidFill>
                   <a:srgbClr val="5B6B8C"/>
@@ -7176,7 +7285,7 @@
                 <a:ea typeface="Calibri" pitchFamily="34" charset="-122"/>
                 <a:cs typeface="Calibri" pitchFamily="34" charset="-120"/>
               </a:rPr>
-              <a:t>LevelUp — Software Dependability</a:t>
+              <a:t> - Software Dependability</a:t>
             </a:r>
             <a:endParaRPr lang="en-US" sz="1000" dirty="0"/>
           </a:p>
@@ -7717,6 +7826,17 @@
               <a:buNone/>
             </a:pPr>
             <a:r>
+              <a:rPr lang="en-US" sz="1000" dirty="0" err="1">
+                <a:solidFill>
+                  <a:srgbClr val="5B6B8C"/>
+                </a:solidFill>
+                <a:latin typeface="Calibri" pitchFamily="34" charset="0"/>
+                <a:ea typeface="Calibri" pitchFamily="34" charset="-122"/>
+                <a:cs typeface="Calibri" pitchFamily="34" charset="-120"/>
+              </a:rPr>
+              <a:t>LevelUp</a:t>
+            </a:r>
+            <a:r>
               <a:rPr lang="en-US" sz="1000" dirty="0">
                 <a:solidFill>
                   <a:srgbClr val="5B6B8C"/>
@@ -7725,7 +7845,7 @@
                 <a:ea typeface="Calibri" pitchFamily="34" charset="-122"/>
                 <a:cs typeface="Calibri" pitchFamily="34" charset="-120"/>
               </a:rPr>
-              <a:t>LevelUp — Software Dependability</a:t>
+              <a:t> - Software Dependability</a:t>
             </a:r>
             <a:endParaRPr lang="en-US" sz="1000" dirty="0"/>
           </a:p>
@@ -7896,7 +8016,7 @@
                 <a:ea typeface="Cambria" pitchFamily="34" charset="-122"/>
                 <a:cs typeface="Cambria" pitchFamily="34" charset="-120"/>
               </a:rPr>
-              <a:t>Docker — Containerization &amp; Orchestration</a:t>
+              <a:t>Docker - Containerization &amp; Orchestration</a:t>
             </a:r>
             <a:endParaRPr lang="en-US" sz="3200" dirty="0"/>
           </a:p>
@@ -8097,9 +8217,6 @@
           <a:bodyPr wrap="square" lIns="0" tIns="0" rIns="0" bIns="0" rtlCol="0" anchor="ctr"/>
           <a:lstStyle/>
           <a:p>
-            <a:pPr marL="0" indent="0">
-              <a:buNone/>
-            </a:pPr>
             <a:r>
               <a:rPr lang="en-US" sz="1250" dirty="0">
                 <a:solidFill>
@@ -8109,7 +8226,7 @@
                 <a:ea typeface="Calibri" pitchFamily="34" charset="-122"/>
                 <a:cs typeface="Calibri" pitchFamily="34" charset="-120"/>
               </a:rPr>
-              <a:t>surfaced only by moving to Linux-based containers: a table-name case mismatch which was invisible on Windows/MySQL’s case-insensitive default, but a runtime SQL error on Linux.</a:t>
+              <a:t>surfaced in the model layer by moving to Linux-based containers: by default, table aliases are case-sensitive on Unix, but no so on Windows or MacOS. This table-name mismatch caused a runtime SQL error on Linux.</a:t>
             </a:r>
             <a:endParaRPr lang="en-US" sz="1250" dirty="0"/>
           </a:p>
@@ -8179,6 +8296,17 @@
               <a:buNone/>
             </a:pPr>
             <a:r>
+              <a:rPr lang="en-US" sz="1000" dirty="0" err="1">
+                <a:solidFill>
+                  <a:srgbClr val="5B6B8C"/>
+                </a:solidFill>
+                <a:latin typeface="Calibri" pitchFamily="34" charset="0"/>
+                <a:ea typeface="Calibri" pitchFamily="34" charset="-122"/>
+                <a:cs typeface="Calibri" pitchFamily="34" charset="-120"/>
+              </a:rPr>
+              <a:t>LevelUp</a:t>
+            </a:r>
+            <a:r>
               <a:rPr lang="en-US" sz="1000" dirty="0">
                 <a:solidFill>
                   <a:srgbClr val="5B6B8C"/>
@@ -8187,7 +8315,7 @@
                 <a:ea typeface="Calibri" pitchFamily="34" charset="-122"/>
                 <a:cs typeface="Calibri" pitchFamily="34" charset="-120"/>
               </a:rPr>
-              <a:t>LevelUp — Software Dependability</a:t>
+              <a:t> - Software Dependability</a:t>
             </a:r>
             <a:endParaRPr lang="en-US" sz="1000" dirty="0"/>
           </a:p>
@@ -8704,6 +8832,17 @@
               <a:buNone/>
             </a:pPr>
             <a:r>
+              <a:rPr lang="en-US" sz="1000" dirty="0" err="1">
+                <a:solidFill>
+                  <a:srgbClr val="5B6B8C"/>
+                </a:solidFill>
+                <a:latin typeface="Calibri" pitchFamily="34" charset="0"/>
+                <a:ea typeface="Calibri" pitchFamily="34" charset="-122"/>
+                <a:cs typeface="Calibri" pitchFamily="34" charset="-120"/>
+              </a:rPr>
+              <a:t>LevelUp</a:t>
+            </a:r>
+            <a:r>
               <a:rPr lang="en-US" sz="1000" dirty="0">
                 <a:solidFill>
                   <a:srgbClr val="5B6B8C"/>
@@ -8712,7 +8851,7 @@
                 <a:ea typeface="Calibri" pitchFamily="34" charset="-122"/>
                 <a:cs typeface="Calibri" pitchFamily="34" charset="-120"/>
               </a:rPr>
-              <a:t>LevelUp — Software Dependability</a:t>
+              <a:t> - Software Dependability</a:t>
             </a:r>
             <a:endParaRPr lang="en-US" sz="1000" dirty="0"/>
           </a:p>
@@ -9358,7 +9497,7 @@
                 <a:ea typeface="Calibri" pitchFamily="34" charset="-122"/>
                 <a:cs typeface="Calibri" pitchFamily="34" charset="-120"/>
               </a:rPr>
-              <a:t>Coverage is concentrated in the Manager/model layer (50–88%), matching where testing effort was deliberately focused. The controller layer is thinner (14–49%), reflecting thin coordination code delegating to already-tested methods. The gap between raw mutation score and test strength is  explained because 282 of 512 mutants sat on code the test suite never executed at all.</a:t>
+              <a:t>Coverage is concentrated in the Model layer (50–88%), matching where testing effort was mostly focused. The Controller layer was tested less (14–49%), reflecting the fact its mostly delegating business logic to already tested Model methods and forwarding the processed data to JSPs for rendering. The gap between raw mutation score and test strength is  explained because 282 of 512 mutants sat on code the test suite never executed at all.</a:t>
             </a:r>
             <a:endParaRPr lang="en-US" sz="1350" dirty="0"/>
           </a:p>
@@ -9389,6 +9528,17 @@
               <a:buNone/>
             </a:pPr>
             <a:r>
+              <a:rPr lang="en-US" sz="1000" dirty="0" err="1">
+                <a:solidFill>
+                  <a:srgbClr val="5B6B8C"/>
+                </a:solidFill>
+                <a:latin typeface="Calibri" pitchFamily="34" charset="0"/>
+                <a:ea typeface="Calibri" pitchFamily="34" charset="-122"/>
+                <a:cs typeface="Calibri" pitchFamily="34" charset="-120"/>
+              </a:rPr>
+              <a:t>LevelUp</a:t>
+            </a:r>
+            <a:r>
               <a:rPr lang="en-US" sz="1000" dirty="0">
                 <a:solidFill>
                   <a:srgbClr val="5B6B8C"/>
@@ -9397,7 +9547,7 @@
                 <a:ea typeface="Calibri" pitchFamily="34" charset="-122"/>
                 <a:cs typeface="Calibri" pitchFamily="34" charset="-120"/>
               </a:rPr>
-              <a:t>LevelUp — Software Dependability</a:t>
+              <a:t> - Software Dependability</a:t>
             </a:r>
             <a:endParaRPr lang="en-US" sz="1000" dirty="0"/>
           </a:p>
